--- a/test/test_slide_review_regen_output/slide_04_v1.pptx
+++ b/test/test_slide_review_regen_output/slide_04_v1.pptx
@@ -3203,7 +3203,7 @@
         </p:nvSpPr>
         <p:spPr>
           <a:xfrm>
-            <a:off x="724852" y="65246"/>
+            <a:off x="724852" y="446246"/>
             <a:ext cx="10346229" cy="594360"/>
           </a:xfrm>
           <a:prstGeom prst="rect">
@@ -3280,7 +3280,7 @@
         <p:spPr>
           <a:xfrm>
             <a:off x="931545" y="1345882"/>
-            <a:ext cx="10572845" cy="335280"/>
+            <a:ext cx="15247906" cy="335280"/>
           </a:xfrm>
           <a:prstGeom prst="rect">
             <a:avLst/>
@@ -3306,7 +3306,18 @@
                 <a:ea typeface="Microsoft YaHei"/>
                 <a:cs typeface="Arial"/>
               </a:rPr>
-              <a:t>The Transformer consists of an encoder-decoder structure using stacked self-attention</a:t>
+              <a:t>The Transformer consists of an encoder-decoder structure using</a:t>
+            </a:r>
+            <a:r>
+              <a:rPr lang="zh-CN" sz="1650" dirty="0">
+                <a:solidFill>
+                  <a:srgbClr val="333333"/>
+                </a:solidFill>
+                <a:latin typeface="Arial"/>
+                <a:ea typeface="Microsoft YaHei"/>
+                <a:cs typeface="Arial"/>
+              </a:rPr>
+              <a:t>stacked self-attention and point-wise, fully connected layers.</a:t>
             </a:r>
           </a:p>
         </p:txBody>
@@ -3319,8 +3330,8 @@
         </p:nvSpPr>
         <p:spPr>
           <a:xfrm>
-            <a:off x="931545" y="1364932"/>
-            <a:ext cx="4716971" cy="335280"/>
+            <a:off x="931545" y="2298382"/>
+            <a:ext cx="14187583" cy="335280"/>
           </a:xfrm>
           <a:prstGeom prst="rect">
             <a:avLst/>
@@ -3346,7 +3357,18 @@
                 <a:ea typeface="Microsoft YaHei"/>
                 <a:cs typeface="Arial"/>
               </a:rPr>
-              <a:t>and point-wise, fully connected layers.</a:t>
+              <a:t>Key components include multi-head attention, scaled dot-product</a:t>
+            </a:r>
+            <a:r>
+              <a:rPr lang="zh-CN" sz="1650" dirty="0">
+                <a:solidFill>
+                  <a:srgbClr val="333333"/>
+                </a:solidFill>
+                <a:latin typeface="Arial"/>
+                <a:ea typeface="Microsoft YaHei"/>
+                <a:cs typeface="Arial"/>
+              </a:rPr>
+              <a:t>attention, and position-wise feed-forward networks.</a:t>
             </a:r>
           </a:p>
         </p:txBody>
@@ -3359,8 +3381,8 @@
         </p:nvSpPr>
         <p:spPr>
           <a:xfrm>
-            <a:off x="931545" y="2298382"/>
-            <a:ext cx="9102852" cy="335280"/>
+            <a:off x="931545" y="3250882"/>
+            <a:ext cx="7934087" cy="335280"/>
           </a:xfrm>
           <a:prstGeom prst="rect">
             <a:avLst/>
@@ -3386,37 +3408,8 @@
                 <a:ea typeface="Microsoft YaHei"/>
                 <a:cs typeface="Arial"/>
               </a:rPr>
-              <a:t>Key components include multi-head attention, scaled dot-product attention,</a:t>
-            </a:r>
-          </a:p>
-        </p:txBody>
-      </p:sp>
-      <p:sp>
-        <p:nvSpPr>
-          <p:cNvPr id="9" name="TextBox 9"/>
-          <p:cNvSpPr txBox="1"/>
-          <p:nvPr/>
-        </p:nvSpPr>
-        <p:spPr>
-          <a:xfrm>
-            <a:off x="931545" y="2317432"/>
-            <a:ext cx="5126641" cy="335280"/>
-          </a:xfrm>
-          <a:prstGeom prst="rect">
-            <a:avLst/>
-          </a:prstGeom>
-          <a:noFill/>
-          <a:ln>
-            <a:noFill/>
-          </a:ln>
-        </p:spPr>
-        <p:txBody>
-          <a:bodyPr wrap="none" lIns="0" tIns="0" rIns="0" bIns="0" anchor="t" anchorCtr="0">
-            <a:spAutoFit/>
-          </a:bodyPr>
-          <a:lstStyle/>
-          <a:p>
-            <a:pPr algn="l"/>
+              <a:t>Positional encodings are used to inject sequence order</a:t>
+            </a:r>
             <a:r>
               <a:rPr lang="zh-CN" sz="1650" dirty="0">
                 <a:solidFill>
@@ -3426,54 +3419,38 @@
                 <a:ea typeface="Microsoft YaHei"/>
                 <a:cs typeface="Arial"/>
               </a:rPr>
-              <a:t>and position-wise feed-forward networks.</a:t>
-            </a:r>
-          </a:p>
-        </p:txBody>
-      </p:sp>
-      <p:sp>
-        <p:nvSpPr>
-          <p:cNvPr id="10" name="TextBox 10"/>
-          <p:cNvSpPr txBox="1"/>
+              <a:t>information.</a:t>
+            </a:r>
+          </a:p>
+        </p:txBody>
+      </p:sp>
+      <p:sp>
+        <p:nvSpPr>
+          <p:cNvPr id="9" name="Rectangle 9"/>
+          <p:cNvSpPr/>
           <p:nvPr/>
         </p:nvSpPr>
         <p:spPr>
           <a:xfrm>
-            <a:off x="931545" y="3250882"/>
-            <a:ext cx="8006382" cy="335280"/>
+            <a:off x="8096250" y="1409700"/>
+            <a:ext cx="4038600" cy="3086100"/>
           </a:xfrm>
           <a:prstGeom prst="rect">
             <a:avLst/>
           </a:prstGeom>
-          <a:noFill/>
-          <a:ln>
-            <a:noFill/>
+          <a:solidFill>
+            <a:srgbClr val="FFFFFF"/>
+          </a:solidFill>
+          <a:ln w="9525">
+            <a:solidFill>
+              <a:srgbClr val="CCCCCC"/>
+            </a:solidFill>
           </a:ln>
         </p:spPr>
-        <p:txBody>
-          <a:bodyPr wrap="none" lIns="0" tIns="0" rIns="0" bIns="0" anchor="t" anchorCtr="0">
-            <a:spAutoFit/>
-          </a:bodyPr>
-          <a:lstStyle/>
-          <a:p>
-            <a:pPr algn="l"/>
-            <a:r>
-              <a:rPr lang="zh-CN" sz="1650" dirty="0">
-                <a:solidFill>
-                  <a:srgbClr val="333333"/>
-                </a:solidFill>
-                <a:latin typeface="Arial"/>
-                <a:ea typeface="Microsoft YaHei"/>
-                <a:cs typeface="Arial"/>
-              </a:rPr>
-              <a:t>Positional encodings are used to inject sequence order information.</a:t>
-            </a:r>
-          </a:p>
-        </p:txBody>
       </p:sp>
       <p:pic>
         <p:nvPicPr>
-          <p:cNvPr id="11" name="Image 11"/>
+          <p:cNvPr id="10" name="Image 10"/>
           <p:cNvPicPr>
             <a:picLocks noChangeAspect="1"/>
           </p:cNvPicPr>
@@ -3487,8 +3464,8 @@
         </p:blipFill>
         <p:spPr>
           <a:xfrm>
-            <a:off x="6837998" y="1524000"/>
-            <a:ext cx="5374005" cy="2857500"/>
+            <a:off x="8210550" y="1524000"/>
+            <a:ext cx="3810000" cy="2857500"/>
           </a:xfrm>
           <a:prstGeom prst="rect">
             <a:avLst/>
@@ -3497,14 +3474,14 @@
       </p:pic>
       <p:sp>
         <p:nvSpPr>
-          <p:cNvPr id="12" name="TextBox 12"/>
+          <p:cNvPr id="11" name="TextBox 11"/>
           <p:cNvSpPr txBox="1"/>
           <p:nvPr/>
         </p:nvSpPr>
         <p:spPr>
           <a:xfrm>
-            <a:off x="7602855" y="4521518"/>
-            <a:ext cx="8404050" cy="274320"/>
+            <a:off x="8079105" y="4331018"/>
+            <a:ext cx="11933349" cy="274320"/>
           </a:xfrm>
           <a:prstGeom prst="rect">
             <a:avLst/>
@@ -3530,60 +3507,20 @@
                 <a:ea typeface="Microsoft YaHei"/>
                 <a:cs typeface="Arial"/>
               </a:rPr>
-              <a:t>(left) Scaled Dot-Product Attention. (right) Multi-Head Attention consists of several</a:t>
-            </a:r>
-          </a:p>
-        </p:txBody>
-      </p:sp>
-      <p:sp>
-        <p:nvSpPr>
-          <p:cNvPr id="13" name="TextBox 13"/>
+              <a:t>(left) Scaled Dot-Product Attention. (right) Multi-Head Attention consists of several attention layers running in parallel.</a:t>
+            </a:r>
+          </a:p>
+        </p:txBody>
+      </p:sp>
+      <p:sp>
+        <p:nvSpPr>
+          <p:cNvPr id="12" name="TextBox 12"/>
           <p:cNvSpPr txBox="1"/>
           <p:nvPr/>
         </p:nvSpPr>
         <p:spPr>
           <a:xfrm>
-            <a:off x="7602855" y="4536758"/>
-            <a:ext cx="3504438" cy="274320"/>
-          </a:xfrm>
-          <a:prstGeom prst="rect">
-            <a:avLst/>
-          </a:prstGeom>
-          <a:noFill/>
-          <a:ln>
-            <a:noFill/>
-          </a:ln>
-        </p:spPr>
-        <p:txBody>
-          <a:bodyPr wrap="none" lIns="0" tIns="0" rIns="0" bIns="0" anchor="t" anchorCtr="0">
-            <a:spAutoFit/>
-          </a:bodyPr>
-          <a:lstStyle/>
-          <a:p>
-            <a:pPr algn="l"/>
-            <a:r>
-              <a:rPr lang="zh-CN" sz="1350" dirty="0">
-                <a:solidFill>
-                  <a:srgbClr val="666666"/>
-                </a:solidFill>
-                <a:latin typeface="Arial"/>
-                <a:ea typeface="Microsoft YaHei"/>
-                <a:cs typeface="Arial"/>
-              </a:rPr>
-              <a:t>attention layers running in parallel.</a:t>
-            </a:r>
-          </a:p>
-        </p:txBody>
-      </p:sp>
-      <p:sp>
-        <p:nvSpPr>
-          <p:cNvPr id="14" name="TextBox 14"/>
-          <p:cNvSpPr txBox="1"/>
-          <p:nvPr/>
-        </p:nvSpPr>
-        <p:spPr>
-          <a:xfrm>
-            <a:off x="10940415" y="6363652"/>
+            <a:off x="11141821" y="6363652"/>
             <a:ext cx="111014" cy="213360"/>
           </a:xfrm>
           <a:prstGeom prst="rect">
@@ -3600,7 +3537,7 @@
           </a:bodyPr>
           <a:lstStyle/>
           <a:p>
-            <a:pPr algn="l"/>
+            <a:pPr algn="r"/>
             <a:r>
               <a:rPr lang="zh-CN" sz="1050" dirty="0">
                 <a:solidFill>
